--- a/docs/slides/apresentacao-biblioteca.pptx
+++ b/docs/slides/apresentacao-biblioteca.pptx
@@ -939,7 +939,7 @@
           <a:lstStyle/>
           <a:p>
             <a:r>
-              <a:t>Todas as saídas são reais, do Maude 3.5.1. Os 75 testes têm o resultado esperado escrito antes do reduce e um script confere automaticamente. O teste aleatório gera 2000 históricos de operações válidas e inválidas e confere quatro coisas em cada um. Para saber se o teste aleatório presta, quebramos o código de propósito (removemos a guarda do limite) e ele acusou 10 falhas.</a:t>
+              <a:t>Todas as saídas são reais, do Maude 3.5.1, e tudo é feito em Maude. Os 75 testes têm o resultado esperado escrito antes do reduce, e o módulo CONFERENCIA repete cada um comparando com o esperado: todos dão true. Em verificacao.maude, 28 regras rl aplicam cada operação a qualquer estado, e o search percorre os 6613 estados alcançáveis com 4 livros e 2 usuários: nenhum viola o invariante, e guarda, diagnóstico e efeito sempre concordam. Para saber se a busca presta, quebramos o código de propósito, um defeito por vez (R2, R4, R5, R6, E2, E3, E4), e os sete foram detectados. Limite: só vale para 4 livros e 2 usuários; para tamanho qualquer valem as provas por indução.</a:t>
             </a:r>
           </a:p>
         </p:txBody>
@@ -1009,7 +1009,7 @@
           <a:lstStyle/>
           <a:p>
             <a:r>
-              <a:t>A especificação representa as 11 funcionalidades, as 7 regras e dez situações inválidas, com invariantes. O que não foi modelado são escolhas de abstração, não esquecimentos. Ser honesto sobre as limitações: a suficiente completude foi verificada de forma empírica e não com a ferramenta SCC; as provas são em papel; o limite de 3 empréstimos é arbitrário.</a:t>
+              <a:t>A especificação representa as 11 funcionalidades, as 7 regras e dez situações inválidas, com invariantes. O que não foi modelado são escolhas de abstração, não esquecimentos. Ser honesto sobre as limitações: a suficiente completude não foi checada com a ferramenta SCC; as provas são em papel e a busca exaustiva cobre só 4 livros e 2 usuários; o limite de 3 empréstimos é arbitrário.</a:t>
             </a:r>
           </a:p>
         </p:txBody>
@@ -10435,43 +10435,7 @@
                 </a:solidFill>
                 <a:latin typeface="Calibri"/>
               </a:rPr>
-              <a:t>Por isso: </a:t>
-            </a:r>
-            <a:r>
-              <a:rPr sz="1700" b="1">
-                <a:solidFill>
-                  <a:srgbClr val="222B36"/>
-                </a:solidFill>
-                <a:latin typeface="Calibri"/>
-              </a:rPr>
-              <a:t>prova em papel</a:t>
-            </a:r>
-            <a:r>
-              <a:rPr sz="1700" b="0">
-                <a:solidFill>
-                  <a:srgbClr val="222B36"/>
-                </a:solidFill>
-                <a:latin typeface="Calibri"/>
-              </a:rPr>
-              <a:t> (indução) + </a:t>
-            </a:r>
-            <a:r>
-              <a:rPr sz="1700" b="1">
-                <a:solidFill>
-                  <a:srgbClr val="222B36"/>
-                </a:solidFill>
-                <a:latin typeface="Calibri"/>
-              </a:rPr>
-              <a:t>instâncias concretas</a:t>
-            </a:r>
-            <a:r>
-              <a:rPr sz="1700" b="0">
-                <a:solidFill>
-                  <a:srgbClr val="222B36"/>
-                </a:solidFill>
-                <a:latin typeface="Calibri"/>
-              </a:rPr>
-              <a:t> na demo e no teste aleatório.</a:t>
+              <a:t>Por isso: prova em papel (indução) + instâncias na demo e busca em todos os estados.</a:t>
             </a:r>
           </a:p>
         </p:txBody>
@@ -10741,16 +10705,7 @@
                 </a:solidFill>
                 <a:latin typeface="Calibri"/>
               </a:rPr>
-              <a:t>0 divergências com o </a:t>
-            </a:r>
-            <a:r>
-              <a:rPr sz="1600" b="0">
-                <a:solidFill>
-                  <a:srgbClr val="FFFFFF"/>
-                </a:solidFill>
-                <a:latin typeface="Consolas"/>
-              </a:rPr>
-              <a:t>*** esperado</a:t>
+              <a:t>0 divergências (em Maude)</a:t>
             </a:r>
           </a:p>
         </p:txBody>
@@ -10809,7 +10764,7 @@
                 </a:solidFill>
                 <a:latin typeface="Calibri"/>
               </a:rPr>
-              <a:t>2000</a:t>
+              <a:t>6613</a:t>
             </a:r>
           </a:p>
           <a:p>
@@ -10825,7 +10780,7 @@
                 </a:solidFill>
                 <a:latin typeface="Calibri"/>
               </a:rPr>
-              <a:t>históricos aleatórios</a:t>
+              <a:t>estados alcançáveis</a:t>
             </a:r>
           </a:p>
           <a:p>
@@ -10841,7 +10796,7 @@
                 </a:solidFill>
                 <a:latin typeface="Calibri"/>
               </a:rPr>
-              <a:t>24000 checagens, 0 falhas</a:t>
+              <a:t>invariante nunca violado</a:t>
             </a:r>
           </a:p>
         </p:txBody>
@@ -10900,7 +10855,7 @@
                 </a:solidFill>
                 <a:latin typeface="Calibri"/>
               </a:rPr>
-              <a:t>10</a:t>
+              <a:t>7</a:t>
             </a:r>
           </a:p>
           <a:p>
@@ -10916,7 +10871,7 @@
                 </a:solidFill>
                 <a:latin typeface="Calibri"/>
               </a:rPr>
-              <a:t>falhas detectadas</a:t>
+              <a:t>defeitos detectados</a:t>
             </a:r>
           </a:p>
           <a:p>
@@ -10932,7 +10887,7 @@
                 </a:solidFill>
                 <a:latin typeface="Calibri"/>
               </a:rPr>
-              <a:t>ao quebrar a guarda E4 (teste de mutação)</a:t>
+              <a:t>ao quebrar o código (7 mutações)</a:t>
             </a:r>
           </a:p>
         </p:txBody>
@@ -10973,7 +10928,7 @@
                           </a:solidFill>
                           <a:latin typeface="Calibri"/>
                         </a:rPr>
-                        <a:t>Checagem do teste aleatório</a:t>
+                        <a:t>Busca em verificacao.maude</a:t>
                       </a:r>
                     </a:p>
                   </a:txBody>
@@ -11021,16 +10976,7 @@
                           </a:solidFill>
                           <a:latin typeface="Consolas"/>
                         </a:rPr>
-                        <a:t>invariante?</a:t>
-                      </a:r>
-                      <a:r>
-                        <a:rPr sz="1600" b="0">
-                          <a:solidFill>
-                            <a:srgbClr val="222B36"/>
-                          </a:solidFill>
-                          <a:latin typeface="Calibri"/>
-                        </a:rPr>
-                        <a:t> verdadeiro em todo estado</a:t>
+                        <a:t>invariante?(B) =/= true: sem solução</a:t>
                       </a:r>
                     </a:p>
                   </a:txBody>
@@ -11078,7 +11024,7 @@
                           </a:solidFill>
                           <a:latin typeface="Calibri"/>
                         </a:rPr>
-                        <a:t>forma normal só com construtores</a:t>
+                        <a:t>termo travado seria achado</a:t>
                       </a:r>
                     </a:p>
                   </a:txBody>
@@ -11101,7 +11047,7 @@
                           </a:solidFill>
                           <a:latin typeface="Calibri"/>
                         </a:rPr>
-                        <a:t>suficiente completude (empírica)</a:t>
+                        <a:t>suficiente completude (indireta)</a:t>
                       </a:r>
                     </a:p>
                   </a:txBody>
@@ -11126,34 +11072,7 @@
                           </a:solidFill>
                           <a:latin typeface="Consolas"/>
                         </a:rPr>
-                        <a:t>podeX?</a:t>
-                      </a:r>
-                      <a:r>
-                        <a:rPr sz="1600" b="0">
-                          <a:solidFill>
-                            <a:srgbClr val="222B36"/>
-                          </a:solidFill>
-                          <a:latin typeface="Calibri"/>
-                        </a:rPr>
-                        <a:t> ⇔ </a:t>
-                      </a:r>
-                      <a:r>
-                        <a:rPr sz="1600" b="0">
-                          <a:solidFill>
-                            <a:srgbClr val="2F5D9B"/>
-                          </a:solidFill>
-                          <a:latin typeface="Consolas"/>
-                        </a:rPr>
-                        <a:t>diagX == ok</a:t>
-                      </a:r>
-                      <a:r>
-                        <a:rPr sz="1600" b="0">
-                          <a:solidFill>
-                            <a:srgbClr val="222B36"/>
-                          </a:solidFill>
-                          <a:latin typeface="Calibri"/>
-                        </a:rPr>
-                        <a:t> ⇔ estado muda</a:t>
+                        <a:t>podeX? ⇔ diagX == ok ⇔ estado muda</a:t>
                       </a:r>
                     </a:p>
                   </a:txBody>
@@ -11755,7 +11674,7 @@
                 </a:solidFill>
                 <a:latin typeface="Calibri"/>
               </a:rPr>
-              <a:t>Suficiente completude só verificada empiricamente (sem ferramenta SCC)</a:t>
+              <a:t>Suficiente completude sem a ferramenta SCC (só indireta)</a:t>
             </a:r>
           </a:p>
           <a:p>
@@ -11772,7 +11691,7 @@
                 </a:solidFill>
                 <a:latin typeface="Calibri"/>
               </a:rPr>
-              <a:t>Provas feitas em papel, não mecanizadas</a:t>
+              <a:t>Provas em papel; busca só até 4 livros</a:t>
             </a:r>
           </a:p>
           <a:p>
@@ -12184,34 +12103,7 @@
                 </a:solidFill>
                 <a:latin typeface="Calibri"/>
               </a:rPr>
-              <a:t>75 testes</a:t>
-            </a:r>
-            <a:r>
-              <a:rPr sz="2200" b="0">
-                <a:solidFill>
-                  <a:srgbClr val="222B36"/>
-                </a:solidFill>
-                <a:latin typeface="Calibri"/>
-              </a:rPr>
-              <a:t> e </a:t>
-            </a:r>
-            <a:r>
-              <a:rPr sz="2200" b="1">
-                <a:solidFill>
-                  <a:srgbClr val="222B36"/>
-                </a:solidFill>
-                <a:latin typeface="Calibri"/>
-              </a:rPr>
-              <a:t>2000 históricos aleatórios</a:t>
-            </a:r>
-            <a:r>
-              <a:rPr sz="2200" b="0">
-                <a:solidFill>
-                  <a:srgbClr val="222B36"/>
-                </a:solidFill>
-                <a:latin typeface="Calibri"/>
-              </a:rPr>
-              <a:t> com o Maude real, sem divergências</a:t>
+              <a:t>75 testes conferidos em Maude e busca em 6613 estados, sem violações</a:t>
             </a:r>
           </a:p>
         </p:txBody>
